--- a/formations/output/biostat-module-4-biomedical.pptx
+++ b/formations/output/biostat-module-4-biomedical.pptx
@@ -4014,7 +4014,7 @@
         <p:spPr>
           <a:xfrm>
             <a:off x="6812280" y="3566160"/>
-            <a:ext cx="239116" cy="0"/>
+            <a:ext cx="239116" cy="4572"/>
           </a:xfrm>
           <a:prstGeom prst="line">
             <a:avLst/>
@@ -4037,7 +4037,7 @@
         <p:spPr>
           <a:xfrm>
             <a:off x="7051396" y="3566160"/>
-            <a:ext cx="0" cy="0"/>
+            <a:ext cx="4572" cy="4572"/>
           </a:xfrm>
           <a:prstGeom prst="line">
             <a:avLst/>
@@ -4060,7 +4060,7 @@
         <p:spPr>
           <a:xfrm>
             <a:off x="7051396" y="3566160"/>
-            <a:ext cx="0" cy="65837"/>
+            <a:ext cx="4572" cy="65837"/>
           </a:xfrm>
           <a:prstGeom prst="line">
             <a:avLst/>
@@ -4083,7 +4083,7 @@
         <p:spPr>
           <a:xfrm>
             <a:off x="7051396" y="3631997"/>
-            <a:ext cx="382585" cy="0"/>
+            <a:ext cx="382585" cy="4572"/>
           </a:xfrm>
           <a:prstGeom prst="line">
             <a:avLst/>
@@ -4106,7 +4106,7 @@
         <p:spPr>
           <a:xfrm>
             <a:off x="7433981" y="3631997"/>
-            <a:ext cx="0" cy="0"/>
+            <a:ext cx="4572" cy="4572"/>
           </a:xfrm>
           <a:prstGeom prst="line">
             <a:avLst/>
@@ -4129,7 +4129,7 @@
         <p:spPr>
           <a:xfrm>
             <a:off x="7433981" y="3631997"/>
-            <a:ext cx="0" cy="87782"/>
+            <a:ext cx="4572" cy="87782"/>
           </a:xfrm>
           <a:prstGeom prst="line">
             <a:avLst/>
@@ -4152,7 +4152,7 @@
         <p:spPr>
           <a:xfrm>
             <a:off x="7433981" y="3719779"/>
-            <a:ext cx="430408" cy="0"/>
+            <a:ext cx="430408" cy="4572"/>
           </a:xfrm>
           <a:prstGeom prst="line">
             <a:avLst/>
@@ -4175,7 +4175,7 @@
         <p:spPr>
           <a:xfrm>
             <a:off x="7864389" y="3719779"/>
-            <a:ext cx="0" cy="0"/>
+            <a:ext cx="4572" cy="4572"/>
           </a:xfrm>
           <a:prstGeom prst="line">
             <a:avLst/>
@@ -4198,7 +4198,7 @@
         <p:spPr>
           <a:xfrm>
             <a:off x="7864389" y="3719779"/>
-            <a:ext cx="0" cy="109728"/>
+            <a:ext cx="4572" cy="109728"/>
           </a:xfrm>
           <a:prstGeom prst="line">
             <a:avLst/>
@@ -4221,7 +4221,7 @@
         <p:spPr>
           <a:xfrm>
             <a:off x="7864389" y="3829507"/>
-            <a:ext cx="478231" cy="0"/>
+            <a:ext cx="478231" cy="4572"/>
           </a:xfrm>
           <a:prstGeom prst="line">
             <a:avLst/>
@@ -4244,7 +4244,7 @@
         <p:spPr>
           <a:xfrm>
             <a:off x="8342620" y="3829507"/>
-            <a:ext cx="0" cy="0"/>
+            <a:ext cx="4572" cy="4572"/>
           </a:xfrm>
           <a:prstGeom prst="line">
             <a:avLst/>
@@ -4267,7 +4267,7 @@
         <p:spPr>
           <a:xfrm>
             <a:off x="8342620" y="3829507"/>
-            <a:ext cx="0" cy="131674"/>
+            <a:ext cx="4572" cy="131674"/>
           </a:xfrm>
           <a:prstGeom prst="line">
             <a:avLst/>
@@ -4290,7 +4290,7 @@
         <p:spPr>
           <a:xfrm>
             <a:off x="8342620" y="3961181"/>
-            <a:ext cx="478231" cy="0"/>
+            <a:ext cx="478231" cy="4572"/>
           </a:xfrm>
           <a:prstGeom prst="line">
             <a:avLst/>
@@ -4313,7 +4313,7 @@
         <p:spPr>
           <a:xfrm>
             <a:off x="8820851" y="3961181"/>
-            <a:ext cx="0" cy="0"/>
+            <a:ext cx="4572" cy="4572"/>
           </a:xfrm>
           <a:prstGeom prst="line">
             <a:avLst/>
@@ -4336,7 +4336,7 @@
         <p:spPr>
           <a:xfrm>
             <a:off x="8820851" y="3961181"/>
-            <a:ext cx="0" cy="131674"/>
+            <a:ext cx="4572" cy="131674"/>
           </a:xfrm>
           <a:prstGeom prst="line">
             <a:avLst/>
@@ -4359,7 +4359,7 @@
         <p:spPr>
           <a:xfrm>
             <a:off x="8820851" y="4092854"/>
-            <a:ext cx="621701" cy="0"/>
+            <a:ext cx="621701" cy="4572"/>
           </a:xfrm>
           <a:prstGeom prst="line">
             <a:avLst/>
@@ -4382,7 +4382,7 @@
         <p:spPr>
           <a:xfrm>
             <a:off x="9442552" y="4092854"/>
-            <a:ext cx="0" cy="0"/>
+            <a:ext cx="4572" cy="4572"/>
           </a:xfrm>
           <a:prstGeom prst="line">
             <a:avLst/>
@@ -4405,7 +4405,7 @@
         <p:spPr>
           <a:xfrm>
             <a:off x="9442552" y="4092854"/>
-            <a:ext cx="0" cy="153619"/>
+            <a:ext cx="4572" cy="153619"/>
           </a:xfrm>
           <a:prstGeom prst="line">
             <a:avLst/>
@@ -4428,7 +4428,7 @@
         <p:spPr>
           <a:xfrm>
             <a:off x="9442552" y="4246474"/>
-            <a:ext cx="621701" cy="0"/>
+            <a:ext cx="621701" cy="4572"/>
           </a:xfrm>
           <a:prstGeom prst="line">
             <a:avLst/>
@@ -4451,7 +4451,7 @@
         <p:spPr>
           <a:xfrm>
             <a:off x="10064252" y="4246474"/>
-            <a:ext cx="0" cy="0"/>
+            <a:ext cx="4572" cy="4572"/>
           </a:xfrm>
           <a:prstGeom prst="line">
             <a:avLst/>
@@ -4474,7 +4474,7 @@
         <p:spPr>
           <a:xfrm>
             <a:off x="10064252" y="4246474"/>
-            <a:ext cx="0" cy="153619"/>
+            <a:ext cx="4572" cy="153619"/>
           </a:xfrm>
           <a:prstGeom prst="line">
             <a:avLst/>
@@ -4497,7 +4497,7 @@
         <p:spPr>
           <a:xfrm>
             <a:off x="10064252" y="4400093"/>
-            <a:ext cx="669524" cy="0"/>
+            <a:ext cx="669524" cy="4572"/>
           </a:xfrm>
           <a:prstGeom prst="line">
             <a:avLst/>
@@ -4520,7 +4520,7 @@
         <p:spPr>
           <a:xfrm>
             <a:off x="10733776" y="4400093"/>
-            <a:ext cx="0" cy="0"/>
+            <a:ext cx="4572" cy="4572"/>
           </a:xfrm>
           <a:prstGeom prst="line">
             <a:avLst/>
@@ -4543,7 +4543,7 @@
         <p:spPr>
           <a:xfrm>
             <a:off x="10733776" y="4400093"/>
-            <a:ext cx="0" cy="153619"/>
+            <a:ext cx="4572" cy="153619"/>
           </a:xfrm>
           <a:prstGeom prst="line">
             <a:avLst/>
@@ -4566,7 +4566,7 @@
         <p:spPr>
           <a:xfrm>
             <a:off x="10733776" y="4553712"/>
-            <a:ext cx="621701" cy="0"/>
+            <a:ext cx="621701" cy="4572"/>
           </a:xfrm>
           <a:prstGeom prst="line">
             <a:avLst/>
@@ -5426,7 +5426,7 @@
         <p:spPr>
           <a:xfrm>
             <a:off x="6812280" y="3474720"/>
-            <a:ext cx="239116" cy="0"/>
+            <a:ext cx="239116" cy="4572"/>
           </a:xfrm>
           <a:prstGeom prst="line">
             <a:avLst/>
@@ -5449,7 +5449,7 @@
         <p:spPr>
           <a:xfrm>
             <a:off x="7051396" y="3474720"/>
-            <a:ext cx="0" cy="0"/>
+            <a:ext cx="4572" cy="4572"/>
           </a:xfrm>
           <a:prstGeom prst="line">
             <a:avLst/>
@@ -5472,7 +5472,7 @@
         <p:spPr>
           <a:xfrm>
             <a:off x="7051396" y="3474720"/>
-            <a:ext cx="0" cy="44806"/>
+            <a:ext cx="4572" cy="44806"/>
           </a:xfrm>
           <a:prstGeom prst="line">
             <a:avLst/>
@@ -5495,7 +5495,7 @@
         <p:spPr>
           <a:xfrm>
             <a:off x="7051396" y="3519526"/>
-            <a:ext cx="621701" cy="0"/>
+            <a:ext cx="621701" cy="4572"/>
           </a:xfrm>
           <a:prstGeom prst="line">
             <a:avLst/>
@@ -5518,7 +5518,7 @@
         <p:spPr>
           <a:xfrm>
             <a:off x="7673096" y="3519526"/>
-            <a:ext cx="0" cy="0"/>
+            <a:ext cx="4572" cy="4572"/>
           </a:xfrm>
           <a:prstGeom prst="line">
             <a:avLst/>
@@ -5541,7 +5541,7 @@
         <p:spPr>
           <a:xfrm>
             <a:off x="7673096" y="3519526"/>
-            <a:ext cx="0" cy="112014"/>
+            <a:ext cx="4572" cy="112014"/>
           </a:xfrm>
           <a:prstGeom prst="line">
             <a:avLst/>
@@ -5564,7 +5564,7 @@
         <p:spPr>
           <a:xfrm>
             <a:off x="7673096" y="3631540"/>
-            <a:ext cx="669524" cy="0"/>
+            <a:ext cx="669524" cy="4572"/>
           </a:xfrm>
           <a:prstGeom prst="line">
             <a:avLst/>
@@ -5587,7 +5587,7 @@
         <p:spPr>
           <a:xfrm>
             <a:off x="8342620" y="3631540"/>
-            <a:ext cx="0" cy="0"/>
+            <a:ext cx="4572" cy="4572"/>
           </a:xfrm>
           <a:prstGeom prst="line">
             <a:avLst/>
@@ -5610,7 +5610,7 @@
         <p:spPr>
           <a:xfrm>
             <a:off x="8342620" y="3631540"/>
-            <a:ext cx="0" cy="112014"/>
+            <a:ext cx="4572" cy="112014"/>
           </a:xfrm>
           <a:prstGeom prst="line">
             <a:avLst/>
@@ -5633,7 +5633,7 @@
         <p:spPr>
           <a:xfrm>
             <a:off x="8342620" y="3743554"/>
-            <a:ext cx="621701" cy="0"/>
+            <a:ext cx="621701" cy="4572"/>
           </a:xfrm>
           <a:prstGeom prst="line">
             <a:avLst/>
@@ -5656,7 +5656,7 @@
         <p:spPr>
           <a:xfrm>
             <a:off x="8964320" y="3743554"/>
-            <a:ext cx="0" cy="0"/>
+            <a:ext cx="4572" cy="4572"/>
           </a:xfrm>
           <a:prstGeom prst="line">
             <a:avLst/>
@@ -5679,7 +5679,7 @@
         <p:spPr>
           <a:xfrm>
             <a:off x="8964320" y="3743554"/>
-            <a:ext cx="0" cy="67208"/>
+            <a:ext cx="4572" cy="67208"/>
           </a:xfrm>
           <a:prstGeom prst="line">
             <a:avLst/>
@@ -5702,7 +5702,7 @@
         <p:spPr>
           <a:xfrm>
             <a:off x="8964320" y="3810762"/>
-            <a:ext cx="812993" cy="0"/>
+            <a:ext cx="812993" cy="4572"/>
           </a:xfrm>
           <a:prstGeom prst="line">
             <a:avLst/>
@@ -5725,7 +5725,7 @@
         <p:spPr>
           <a:xfrm>
             <a:off x="9777313" y="3810762"/>
-            <a:ext cx="0" cy="0"/>
+            <a:ext cx="4572" cy="4572"/>
           </a:xfrm>
           <a:prstGeom prst="line">
             <a:avLst/>
@@ -5748,7 +5748,7 @@
         <p:spPr>
           <a:xfrm>
             <a:off x="9777313" y="3810762"/>
-            <a:ext cx="0" cy="112014"/>
+            <a:ext cx="4572" cy="112014"/>
           </a:xfrm>
           <a:prstGeom prst="line">
             <a:avLst/>
@@ -5771,7 +5771,7 @@
         <p:spPr>
           <a:xfrm>
             <a:off x="9777313" y="3922776"/>
-            <a:ext cx="765170" cy="0"/>
+            <a:ext cx="765170" cy="4572"/>
           </a:xfrm>
           <a:prstGeom prst="line">
             <a:avLst/>
@@ -5794,7 +5794,7 @@
         <p:spPr>
           <a:xfrm>
             <a:off x="10542483" y="3922776"/>
-            <a:ext cx="0" cy="0"/>
+            <a:ext cx="4572" cy="4572"/>
           </a:xfrm>
           <a:prstGeom prst="line">
             <a:avLst/>
@@ -5817,7 +5817,7 @@
         <p:spPr>
           <a:xfrm>
             <a:off x="10542483" y="3922776"/>
-            <a:ext cx="0" cy="89611"/>
+            <a:ext cx="4572" cy="89611"/>
           </a:xfrm>
           <a:prstGeom prst="line">
             <a:avLst/>
@@ -5840,7 +5840,7 @@
         <p:spPr>
           <a:xfrm>
             <a:off x="10542483" y="4012387"/>
-            <a:ext cx="812993" cy="0"/>
+            <a:ext cx="812993" cy="4572"/>
           </a:xfrm>
           <a:prstGeom prst="line">
             <a:avLst/>
@@ -5902,7 +5902,7 @@
         <p:spPr>
           <a:xfrm>
             <a:off x="6812280" y="3474720"/>
-            <a:ext cx="191292" cy="0"/>
+            <a:ext cx="191292" cy="4572"/>
           </a:xfrm>
           <a:prstGeom prst="line">
             <a:avLst/>
@@ -5925,7 +5925,7 @@
         <p:spPr>
           <a:xfrm>
             <a:off x="7003572" y="3474720"/>
-            <a:ext cx="0" cy="0"/>
+            <a:ext cx="4572" cy="4572"/>
           </a:xfrm>
           <a:prstGeom prst="line">
             <a:avLst/>
@@ -5948,7 +5948,7 @@
         <p:spPr>
           <a:xfrm>
             <a:off x="7003572" y="3474720"/>
-            <a:ext cx="0" cy="89611"/>
+            <a:ext cx="4572" cy="89611"/>
           </a:xfrm>
           <a:prstGeom prst="line">
             <a:avLst/>
@@ -5971,7 +5971,7 @@
         <p:spPr>
           <a:xfrm>
             <a:off x="7003572" y="3564331"/>
-            <a:ext cx="382585" cy="0"/>
+            <a:ext cx="382585" cy="4572"/>
           </a:xfrm>
           <a:prstGeom prst="line">
             <a:avLst/>
@@ -5994,7 +5994,7 @@
         <p:spPr>
           <a:xfrm>
             <a:off x="7386157" y="3564331"/>
-            <a:ext cx="0" cy="0"/>
+            <a:ext cx="4572" cy="4572"/>
           </a:xfrm>
           <a:prstGeom prst="line">
             <a:avLst/>
@@ -6017,7 +6017,7 @@
         <p:spPr>
           <a:xfrm>
             <a:off x="7386157" y="3564331"/>
-            <a:ext cx="0" cy="156820"/>
+            <a:ext cx="4572" cy="156820"/>
           </a:xfrm>
           <a:prstGeom prst="line">
             <a:avLst/>
@@ -6040,7 +6040,7 @@
         <p:spPr>
           <a:xfrm>
             <a:off x="7386157" y="3721151"/>
-            <a:ext cx="478231" cy="0"/>
+            <a:ext cx="478231" cy="4572"/>
           </a:xfrm>
           <a:prstGeom prst="line">
             <a:avLst/>
@@ -6063,7 +6063,7 @@
         <p:spPr>
           <a:xfrm>
             <a:off x="7864389" y="3721151"/>
-            <a:ext cx="0" cy="0"/>
+            <a:ext cx="4572" cy="4572"/>
           </a:xfrm>
           <a:prstGeom prst="line">
             <a:avLst/>
@@ -6086,7 +6086,7 @@
         <p:spPr>
           <a:xfrm>
             <a:off x="7864389" y="3721151"/>
-            <a:ext cx="0" cy="201625"/>
+            <a:ext cx="4572" cy="201625"/>
           </a:xfrm>
           <a:prstGeom prst="line">
             <a:avLst/>
@@ -6109,7 +6109,7 @@
         <p:spPr>
           <a:xfrm>
             <a:off x="7864389" y="3922776"/>
-            <a:ext cx="621701" cy="0"/>
+            <a:ext cx="621701" cy="4572"/>
           </a:xfrm>
           <a:prstGeom prst="line">
             <a:avLst/>
@@ -6132,7 +6132,7 @@
         <p:spPr>
           <a:xfrm>
             <a:off x="8486089" y="3922776"/>
-            <a:ext cx="0" cy="0"/>
+            <a:ext cx="4572" cy="4572"/>
           </a:xfrm>
           <a:prstGeom prst="line">
             <a:avLst/>
@@ -6155,7 +6155,7 @@
         <p:spPr>
           <a:xfrm>
             <a:off x="8486089" y="3922776"/>
-            <a:ext cx="0" cy="224028"/>
+            <a:ext cx="4572" cy="224028"/>
           </a:xfrm>
           <a:prstGeom prst="line">
             <a:avLst/>
@@ -6178,7 +6178,7 @@
         <p:spPr>
           <a:xfrm>
             <a:off x="8486089" y="4146804"/>
-            <a:ext cx="717347" cy="0"/>
+            <a:ext cx="717347" cy="4572"/>
           </a:xfrm>
           <a:prstGeom prst="line">
             <a:avLst/>
@@ -6201,7 +6201,7 @@
         <p:spPr>
           <a:xfrm>
             <a:off x="9203436" y="4146804"/>
-            <a:ext cx="0" cy="0"/>
+            <a:ext cx="4572" cy="4572"/>
           </a:xfrm>
           <a:prstGeom prst="line">
             <a:avLst/>
@@ -6224,7 +6224,7 @@
         <p:spPr>
           <a:xfrm>
             <a:off x="9203436" y="4146804"/>
-            <a:ext cx="0" cy="224028"/>
+            <a:ext cx="4572" cy="224028"/>
           </a:xfrm>
           <a:prstGeom prst="line">
             <a:avLst/>
@@ -6247,7 +6247,7 @@
         <p:spPr>
           <a:xfrm>
             <a:off x="9203436" y="4370832"/>
-            <a:ext cx="860816" cy="0"/>
+            <a:ext cx="860816" cy="4572"/>
           </a:xfrm>
           <a:prstGeom prst="line">
             <a:avLst/>
@@ -6270,7 +6270,7 @@
         <p:spPr>
           <a:xfrm>
             <a:off x="10064252" y="4370832"/>
-            <a:ext cx="0" cy="0"/>
+            <a:ext cx="4572" cy="4572"/>
           </a:xfrm>
           <a:prstGeom prst="line">
             <a:avLst/>
@@ -6293,7 +6293,7 @@
         <p:spPr>
           <a:xfrm>
             <a:off x="10064252" y="4370832"/>
-            <a:ext cx="0" cy="179222"/>
+            <a:ext cx="4572" cy="179222"/>
           </a:xfrm>
           <a:prstGeom prst="line">
             <a:avLst/>
@@ -6316,7 +6316,7 @@
         <p:spPr>
           <a:xfrm>
             <a:off x="10064252" y="4550054"/>
-            <a:ext cx="812993" cy="0"/>
+            <a:ext cx="812993" cy="4572"/>
           </a:xfrm>
           <a:prstGeom prst="line">
             <a:avLst/>
@@ -6339,7 +6339,7 @@
         <p:spPr>
           <a:xfrm>
             <a:off x="10877245" y="4550054"/>
-            <a:ext cx="0" cy="0"/>
+            <a:ext cx="4572" cy="4572"/>
           </a:xfrm>
           <a:prstGeom prst="line">
             <a:avLst/>
@@ -6362,7 +6362,7 @@
         <p:spPr>
           <a:xfrm>
             <a:off x="10877245" y="4550054"/>
-            <a:ext cx="0" cy="156820"/>
+            <a:ext cx="4572" cy="156820"/>
           </a:xfrm>
           <a:prstGeom prst="line">
             <a:avLst/>
@@ -7038,7 +7038,7 @@
         <p:spPr>
           <a:xfrm>
             <a:off x="8122824" y="3474720"/>
-            <a:ext cx="0" cy="2240280"/>
+            <a:ext cx="4572" cy="2240280"/>
           </a:xfrm>
           <a:prstGeom prst="line">
             <a:avLst/>
@@ -7100,7 +7100,7 @@
         <p:spPr>
           <a:xfrm>
             <a:off x="7587996" y="3754755"/>
-            <a:ext cx="433395" cy="0"/>
+            <a:ext cx="433395" cy="4572"/>
           </a:xfrm>
           <a:prstGeom prst="line">
             <a:avLst/>
@@ -7123,7 +7123,7 @@
         <p:spPr>
           <a:xfrm>
             <a:off x="7587996" y="3699891"/>
-            <a:ext cx="0" cy="109728"/>
+            <a:ext cx="4572" cy="109728"/>
           </a:xfrm>
           <a:prstGeom prst="line">
             <a:avLst/>
@@ -7146,7 +7146,7 @@
         <p:spPr>
           <a:xfrm>
             <a:off x="8021391" y="3699891"/>
-            <a:ext cx="0" cy="109728"/>
+            <a:ext cx="4572" cy="109728"/>
           </a:xfrm>
           <a:prstGeom prst="line">
             <a:avLst/>
@@ -7228,7 +7228,7 @@
         <p:spPr>
           <a:xfrm>
             <a:off x="8141266" y="4314825"/>
-            <a:ext cx="36885" cy="0"/>
+            <a:ext cx="36885" cy="4572"/>
           </a:xfrm>
           <a:prstGeom prst="line">
             <a:avLst/>
@@ -7251,7 +7251,7 @@
         <p:spPr>
           <a:xfrm>
             <a:off x="8141266" y="4259961"/>
-            <a:ext cx="0" cy="109728"/>
+            <a:ext cx="4572" cy="109728"/>
           </a:xfrm>
           <a:prstGeom prst="line">
             <a:avLst/>
@@ -7274,7 +7274,7 @@
         <p:spPr>
           <a:xfrm>
             <a:off x="8178151" y="4259961"/>
-            <a:ext cx="0" cy="109728"/>
+            <a:ext cx="4572" cy="109728"/>
           </a:xfrm>
           <a:prstGeom prst="line">
             <a:avLst/>
@@ -7356,7 +7356,7 @@
         <p:spPr>
           <a:xfrm>
             <a:off x="7707871" y="4874895"/>
-            <a:ext cx="599376" cy="0"/>
+            <a:ext cx="599376" cy="4572"/>
           </a:xfrm>
           <a:prstGeom prst="line">
             <a:avLst/>
@@ -7379,7 +7379,7 @@
         <p:spPr>
           <a:xfrm>
             <a:off x="7707871" y="4820031"/>
-            <a:ext cx="0" cy="109728"/>
+            <a:ext cx="4572" cy="109728"/>
           </a:xfrm>
           <a:prstGeom prst="line">
             <a:avLst/>
@@ -7402,7 +7402,7 @@
         <p:spPr>
           <a:xfrm>
             <a:off x="8307247" y="4820031"/>
-            <a:ext cx="0" cy="109728"/>
+            <a:ext cx="4572" cy="109728"/>
           </a:xfrm>
           <a:prstGeom prst="line">
             <a:avLst/>
@@ -7484,7 +7484,7 @@
         <p:spPr>
           <a:xfrm>
             <a:off x="8915844" y="5434965"/>
-            <a:ext cx="2314512" cy="0"/>
+            <a:ext cx="2314512" cy="4572"/>
           </a:xfrm>
           <a:prstGeom prst="line">
             <a:avLst/>
@@ -7507,7 +7507,7 @@
         <p:spPr>
           <a:xfrm>
             <a:off x="8915844" y="5380101"/>
-            <a:ext cx="0" cy="109728"/>
+            <a:ext cx="4572" cy="109728"/>
           </a:xfrm>
           <a:prstGeom prst="line">
             <a:avLst/>
@@ -7530,7 +7530,7 @@
         <p:spPr>
           <a:xfrm>
             <a:off x="11230356" y="5380101"/>
-            <a:ext cx="0" cy="109728"/>
+            <a:ext cx="4572" cy="109728"/>
           </a:xfrm>
           <a:prstGeom prst="line">
             <a:avLst/>
@@ -7573,7 +7573,7 @@
         <p:spPr>
           <a:xfrm>
             <a:off x="7223760" y="5760720"/>
-            <a:ext cx="4370832" cy="0"/>
+            <a:ext cx="4370832" cy="4572"/>
           </a:xfrm>
           <a:prstGeom prst="line">
             <a:avLst/>
@@ -9643,7 +9643,7 @@
         <p:spPr>
           <a:xfrm>
             <a:off x="4200144" y="4366260"/>
-            <a:ext cx="182880" cy="0"/>
+            <a:ext cx="182880" cy="4572"/>
           </a:xfrm>
           <a:prstGeom prst="line">
             <a:avLst/>
@@ -9687,9 +9687,9 @@
           <p:nvPr/>
         </p:nvSpPr>
         <p:spPr>
-          <a:xfrm>
-            <a:off x="4309872" y="4439412"/>
-            <a:ext cx="73152" cy="-73152"/>
+          <a:xfrm flipV="1">
+            <a:off x="4309872" y="4366260"/>
+            <a:ext cx="73152" cy="73152"/>
           </a:xfrm>
           <a:prstGeom prst="line">
             <a:avLst/>
@@ -9843,7 +9843,7 @@
         <p:spPr>
           <a:xfrm>
             <a:off x="7988808" y="4366260"/>
-            <a:ext cx="182880" cy="0"/>
+            <a:ext cx="182880" cy="4572"/>
           </a:xfrm>
           <a:prstGeom prst="line">
             <a:avLst/>
@@ -9887,9 +9887,9 @@
           <p:nvPr/>
         </p:nvSpPr>
         <p:spPr>
-          <a:xfrm>
-            <a:off x="8098536" y="4439412"/>
-            <a:ext cx="73152" cy="-73152"/>
+          <a:xfrm flipV="1">
+            <a:off x="8098536" y="4366260"/>
+            <a:ext cx="73152" cy="73152"/>
           </a:xfrm>
           <a:prstGeom prst="line">
             <a:avLst/>
@@ -28168,9 +28168,9 @@
           <p:nvPr/>
         </p:nvSpPr>
         <p:spPr>
-          <a:xfrm>
-            <a:off x="7818120" y="5760720"/>
-            <a:ext cx="3776472" cy="-2057400"/>
+          <a:xfrm flipV="1">
+            <a:off x="7818120" y="3703320"/>
+            <a:ext cx="3776472" cy="2057400"/>
           </a:xfrm>
           <a:prstGeom prst="line">
             <a:avLst/>
@@ -28191,9 +28191,9 @@
           <p:nvPr/>
         </p:nvSpPr>
         <p:spPr>
-          <a:xfrm>
-            <a:off x="7818120" y="5760720"/>
-            <a:ext cx="151059" cy="-370332"/>
+          <a:xfrm flipV="1">
+            <a:off x="7818120" y="5390388"/>
+            <a:ext cx="151059" cy="370332"/>
           </a:xfrm>
           <a:prstGeom prst="line">
             <a:avLst/>
@@ -28214,9 +28214,9 @@
           <p:nvPr/>
         </p:nvSpPr>
         <p:spPr>
-          <a:xfrm>
-            <a:off x="7969179" y="5390388"/>
-            <a:ext cx="151059" cy="-288036"/>
+          <a:xfrm flipV="1">
+            <a:off x="7969179" y="5102352"/>
+            <a:ext cx="151059" cy="288036"/>
           </a:xfrm>
           <a:prstGeom prst="line">
             <a:avLst/>
@@ -28237,9 +28237,9 @@
           <p:nvPr/>
         </p:nvSpPr>
         <p:spPr>
-          <a:xfrm>
-            <a:off x="8120238" y="5102352"/>
-            <a:ext cx="151059" cy="-267462"/>
+          <a:xfrm flipV="1">
+            <a:off x="8120238" y="4834890"/>
+            <a:ext cx="151059" cy="267462"/>
           </a:xfrm>
           <a:prstGeom prst="line">
             <a:avLst/>
@@ -28260,9 +28260,9 @@
           <p:nvPr/>
         </p:nvSpPr>
         <p:spPr>
-          <a:xfrm>
-            <a:off x="8271297" y="4834890"/>
-            <a:ext cx="226588" cy="-267462"/>
+          <a:xfrm flipV="1">
+            <a:off x="8271297" y="4567428"/>
+            <a:ext cx="226588" cy="267462"/>
           </a:xfrm>
           <a:prstGeom prst="line">
             <a:avLst/>
@@ -28283,9 +28283,9 @@
           <p:nvPr/>
         </p:nvSpPr>
         <p:spPr>
-          <a:xfrm>
-            <a:off x="8497885" y="4567428"/>
-            <a:ext cx="264353" cy="-205740"/>
+          <a:xfrm flipV="1">
+            <a:off x="8497885" y="4361688"/>
+            <a:ext cx="264353" cy="205740"/>
           </a:xfrm>
           <a:prstGeom prst="line">
             <a:avLst/>
@@ -28306,9 +28306,9 @@
           <p:nvPr/>
         </p:nvSpPr>
         <p:spPr>
-          <a:xfrm>
-            <a:off x="8762238" y="4361688"/>
-            <a:ext cx="302118" cy="-164592"/>
+          <a:xfrm flipV="1">
+            <a:off x="8762238" y="4197096"/>
+            <a:ext cx="302118" cy="164592"/>
           </a:xfrm>
           <a:prstGeom prst="line">
             <a:avLst/>
@@ -28329,9 +28329,9 @@
           <p:nvPr/>
         </p:nvSpPr>
         <p:spPr>
-          <a:xfrm>
-            <a:off x="9064356" y="4197096"/>
-            <a:ext cx="339882" cy="-123444"/>
+          <a:xfrm flipV="1">
+            <a:off x="9064356" y="4073652"/>
+            <a:ext cx="339882" cy="123444"/>
           </a:xfrm>
           <a:prstGeom prst="line">
             <a:avLst/>
@@ -28352,9 +28352,9 @@
           <p:nvPr/>
         </p:nvSpPr>
         <p:spPr>
-          <a:xfrm>
-            <a:off x="9404238" y="4073652"/>
-            <a:ext cx="377647" cy="-102870"/>
+          <a:xfrm flipV="1">
+            <a:off x="9404238" y="3970782"/>
+            <a:ext cx="377647" cy="102870"/>
           </a:xfrm>
           <a:prstGeom prst="line">
             <a:avLst/>
@@ -28375,9 +28375,9 @@
           <p:nvPr/>
         </p:nvSpPr>
         <p:spPr>
-          <a:xfrm>
-            <a:off x="9781885" y="3970782"/>
-            <a:ext cx="377647" cy="-82296"/>
+          <a:xfrm flipV="1">
+            <a:off x="9781885" y="3888486"/>
+            <a:ext cx="377647" cy="82296"/>
           </a:xfrm>
           <a:prstGeom prst="line">
             <a:avLst/>
@@ -28398,9 +28398,9 @@
           <p:nvPr/>
         </p:nvSpPr>
         <p:spPr>
-          <a:xfrm>
-            <a:off x="10159533" y="3888486"/>
-            <a:ext cx="377647" cy="-61722"/>
+          <a:xfrm flipV="1">
+            <a:off x="10159533" y="3826764"/>
+            <a:ext cx="377647" cy="61722"/>
           </a:xfrm>
           <a:prstGeom prst="line">
             <a:avLst/>
@@ -28421,9 +28421,9 @@
           <p:nvPr/>
         </p:nvSpPr>
         <p:spPr>
-          <a:xfrm>
-            <a:off x="10537180" y="3826764"/>
-            <a:ext cx="377647" cy="-41148"/>
+          <a:xfrm flipV="1">
+            <a:off x="10537180" y="3785616"/>
+            <a:ext cx="377647" cy="41148"/>
           </a:xfrm>
           <a:prstGeom prst="line">
             <a:avLst/>
@@ -28444,9 +28444,9 @@
           <p:nvPr/>
         </p:nvSpPr>
         <p:spPr>
-          <a:xfrm>
-            <a:off x="10914827" y="3785616"/>
-            <a:ext cx="302118" cy="-41148"/>
+          <a:xfrm flipV="1">
+            <a:off x="10914827" y="3744468"/>
+            <a:ext cx="302118" cy="41148"/>
           </a:xfrm>
           <a:prstGeom prst="line">
             <a:avLst/>
@@ -28467,9 +28467,9 @@
           <p:nvPr/>
         </p:nvSpPr>
         <p:spPr>
-          <a:xfrm>
-            <a:off x="11216945" y="3744468"/>
-            <a:ext cx="377647" cy="-41148"/>
+          <a:xfrm flipV="1">
+            <a:off x="11216945" y="3703320"/>
+            <a:ext cx="377647" cy="41148"/>
           </a:xfrm>
           <a:prstGeom prst="line">
             <a:avLst/>

--- a/formations/output/biostat-module-4-biomedical.pptx
+++ b/formations/output/biostat-module-4-biomedical.pptx
@@ -3890,7 +3890,7 @@
         <p:spPr>
           <a:xfrm>
             <a:off x="6812280" y="5760720"/>
-            <a:ext cx="4782312" cy="0"/>
+            <a:ext cx="4782312" cy="9144"/>
           </a:xfrm>
           <a:prstGeom prst="line">
             <a:avLst/>
@@ -3913,7 +3913,7 @@
         <p:spPr>
           <a:xfrm>
             <a:off x="6812280" y="3566160"/>
-            <a:ext cx="0" cy="2194560"/>
+            <a:ext cx="9144" cy="2194560"/>
           </a:xfrm>
           <a:prstGeom prst="line">
             <a:avLst/>
@@ -4014,7 +4014,7 @@
         <p:spPr>
           <a:xfrm>
             <a:off x="6812280" y="3566160"/>
-            <a:ext cx="239116" cy="4572"/>
+            <a:ext cx="239116" cy="9144"/>
           </a:xfrm>
           <a:prstGeom prst="line">
             <a:avLst/>
@@ -4037,7 +4037,7 @@
         <p:spPr>
           <a:xfrm>
             <a:off x="7051396" y="3566160"/>
-            <a:ext cx="4572" cy="4572"/>
+            <a:ext cx="9144" cy="9144"/>
           </a:xfrm>
           <a:prstGeom prst="line">
             <a:avLst/>
@@ -4060,7 +4060,7 @@
         <p:spPr>
           <a:xfrm>
             <a:off x="7051396" y="3566160"/>
-            <a:ext cx="4572" cy="65837"/>
+            <a:ext cx="9144" cy="65837"/>
           </a:xfrm>
           <a:prstGeom prst="line">
             <a:avLst/>
@@ -4083,7 +4083,7 @@
         <p:spPr>
           <a:xfrm>
             <a:off x="7051396" y="3631997"/>
-            <a:ext cx="382585" cy="4572"/>
+            <a:ext cx="382585" cy="9144"/>
           </a:xfrm>
           <a:prstGeom prst="line">
             <a:avLst/>
@@ -4106,7 +4106,7 @@
         <p:spPr>
           <a:xfrm>
             <a:off x="7433981" y="3631997"/>
-            <a:ext cx="4572" cy="4572"/>
+            <a:ext cx="9144" cy="9144"/>
           </a:xfrm>
           <a:prstGeom prst="line">
             <a:avLst/>
@@ -4129,7 +4129,7 @@
         <p:spPr>
           <a:xfrm>
             <a:off x="7433981" y="3631997"/>
-            <a:ext cx="4572" cy="87782"/>
+            <a:ext cx="9144" cy="87782"/>
           </a:xfrm>
           <a:prstGeom prst="line">
             <a:avLst/>
@@ -4152,7 +4152,7 @@
         <p:spPr>
           <a:xfrm>
             <a:off x="7433981" y="3719779"/>
-            <a:ext cx="430408" cy="4572"/>
+            <a:ext cx="430408" cy="9144"/>
           </a:xfrm>
           <a:prstGeom prst="line">
             <a:avLst/>
@@ -4175,7 +4175,7 @@
         <p:spPr>
           <a:xfrm>
             <a:off x="7864389" y="3719779"/>
-            <a:ext cx="4572" cy="4572"/>
+            <a:ext cx="9144" cy="9144"/>
           </a:xfrm>
           <a:prstGeom prst="line">
             <a:avLst/>
@@ -4198,7 +4198,7 @@
         <p:spPr>
           <a:xfrm>
             <a:off x="7864389" y="3719779"/>
-            <a:ext cx="4572" cy="109728"/>
+            <a:ext cx="9144" cy="109728"/>
           </a:xfrm>
           <a:prstGeom prst="line">
             <a:avLst/>
@@ -4221,7 +4221,7 @@
         <p:spPr>
           <a:xfrm>
             <a:off x="7864389" y="3829507"/>
-            <a:ext cx="478231" cy="4572"/>
+            <a:ext cx="478231" cy="9144"/>
           </a:xfrm>
           <a:prstGeom prst="line">
             <a:avLst/>
@@ -4244,7 +4244,7 @@
         <p:spPr>
           <a:xfrm>
             <a:off x="8342620" y="3829507"/>
-            <a:ext cx="4572" cy="4572"/>
+            <a:ext cx="9144" cy="9144"/>
           </a:xfrm>
           <a:prstGeom prst="line">
             <a:avLst/>
@@ -4267,7 +4267,7 @@
         <p:spPr>
           <a:xfrm>
             <a:off x="8342620" y="3829507"/>
-            <a:ext cx="4572" cy="131674"/>
+            <a:ext cx="9144" cy="131674"/>
           </a:xfrm>
           <a:prstGeom prst="line">
             <a:avLst/>
@@ -4290,7 +4290,7 @@
         <p:spPr>
           <a:xfrm>
             <a:off x="8342620" y="3961181"/>
-            <a:ext cx="478231" cy="4572"/>
+            <a:ext cx="478231" cy="9144"/>
           </a:xfrm>
           <a:prstGeom prst="line">
             <a:avLst/>
@@ -4313,7 +4313,7 @@
         <p:spPr>
           <a:xfrm>
             <a:off x="8820851" y="3961181"/>
-            <a:ext cx="4572" cy="4572"/>
+            <a:ext cx="9144" cy="9144"/>
           </a:xfrm>
           <a:prstGeom prst="line">
             <a:avLst/>
@@ -4336,7 +4336,7 @@
         <p:spPr>
           <a:xfrm>
             <a:off x="8820851" y="3961181"/>
-            <a:ext cx="4572" cy="131674"/>
+            <a:ext cx="9144" cy="131674"/>
           </a:xfrm>
           <a:prstGeom prst="line">
             <a:avLst/>
@@ -4359,7 +4359,7 @@
         <p:spPr>
           <a:xfrm>
             <a:off x="8820851" y="4092854"/>
-            <a:ext cx="621701" cy="4572"/>
+            <a:ext cx="621701" cy="9144"/>
           </a:xfrm>
           <a:prstGeom prst="line">
             <a:avLst/>
@@ -4382,7 +4382,7 @@
         <p:spPr>
           <a:xfrm>
             <a:off x="9442552" y="4092854"/>
-            <a:ext cx="4572" cy="4572"/>
+            <a:ext cx="9144" cy="9144"/>
           </a:xfrm>
           <a:prstGeom prst="line">
             <a:avLst/>
@@ -4405,7 +4405,7 @@
         <p:spPr>
           <a:xfrm>
             <a:off x="9442552" y="4092854"/>
-            <a:ext cx="4572" cy="153619"/>
+            <a:ext cx="9144" cy="153619"/>
           </a:xfrm>
           <a:prstGeom prst="line">
             <a:avLst/>
@@ -4428,7 +4428,7 @@
         <p:spPr>
           <a:xfrm>
             <a:off x="9442552" y="4246474"/>
-            <a:ext cx="621701" cy="4572"/>
+            <a:ext cx="621701" cy="9144"/>
           </a:xfrm>
           <a:prstGeom prst="line">
             <a:avLst/>
@@ -4451,7 +4451,7 @@
         <p:spPr>
           <a:xfrm>
             <a:off x="10064252" y="4246474"/>
-            <a:ext cx="4572" cy="4572"/>
+            <a:ext cx="9144" cy="9144"/>
           </a:xfrm>
           <a:prstGeom prst="line">
             <a:avLst/>
@@ -4474,7 +4474,7 @@
         <p:spPr>
           <a:xfrm>
             <a:off x="10064252" y="4246474"/>
-            <a:ext cx="4572" cy="153619"/>
+            <a:ext cx="9144" cy="153619"/>
           </a:xfrm>
           <a:prstGeom prst="line">
             <a:avLst/>
@@ -4497,7 +4497,7 @@
         <p:spPr>
           <a:xfrm>
             <a:off x="10064252" y="4400093"/>
-            <a:ext cx="669524" cy="4572"/>
+            <a:ext cx="669524" cy="9144"/>
           </a:xfrm>
           <a:prstGeom prst="line">
             <a:avLst/>
@@ -4520,7 +4520,7 @@
         <p:spPr>
           <a:xfrm>
             <a:off x="10733776" y="4400093"/>
-            <a:ext cx="4572" cy="4572"/>
+            <a:ext cx="9144" cy="9144"/>
           </a:xfrm>
           <a:prstGeom prst="line">
             <a:avLst/>
@@ -4543,7 +4543,7 @@
         <p:spPr>
           <a:xfrm>
             <a:off x="10733776" y="4400093"/>
-            <a:ext cx="4572" cy="153619"/>
+            <a:ext cx="9144" cy="153619"/>
           </a:xfrm>
           <a:prstGeom prst="line">
             <a:avLst/>
@@ -4566,7 +4566,7 @@
         <p:spPr>
           <a:xfrm>
             <a:off x="10733776" y="4553712"/>
-            <a:ext cx="621701" cy="4572"/>
+            <a:ext cx="621701" cy="9144"/>
           </a:xfrm>
           <a:prstGeom prst="line">
             <a:avLst/>
@@ -5302,7 +5302,7 @@
         <p:spPr>
           <a:xfrm>
             <a:off x="6812280" y="5715000"/>
-            <a:ext cx="4782312" cy="0"/>
+            <a:ext cx="4782312" cy="9144"/>
           </a:xfrm>
           <a:prstGeom prst="line">
             <a:avLst/>
@@ -5325,7 +5325,7 @@
         <p:spPr>
           <a:xfrm>
             <a:off x="6812280" y="3474720"/>
-            <a:ext cx="0" cy="2240280"/>
+            <a:ext cx="9144" cy="2240280"/>
           </a:xfrm>
           <a:prstGeom prst="line">
             <a:avLst/>
@@ -5426,7 +5426,7 @@
         <p:spPr>
           <a:xfrm>
             <a:off x="6812280" y="3474720"/>
-            <a:ext cx="239116" cy="4572"/>
+            <a:ext cx="239116" cy="9144"/>
           </a:xfrm>
           <a:prstGeom prst="line">
             <a:avLst/>
@@ -5449,7 +5449,7 @@
         <p:spPr>
           <a:xfrm>
             <a:off x="7051396" y="3474720"/>
-            <a:ext cx="4572" cy="4572"/>
+            <a:ext cx="9144" cy="9144"/>
           </a:xfrm>
           <a:prstGeom prst="line">
             <a:avLst/>
@@ -5472,7 +5472,7 @@
         <p:spPr>
           <a:xfrm>
             <a:off x="7051396" y="3474720"/>
-            <a:ext cx="4572" cy="44806"/>
+            <a:ext cx="9144" cy="44806"/>
           </a:xfrm>
           <a:prstGeom prst="line">
             <a:avLst/>
@@ -5495,7 +5495,7 @@
         <p:spPr>
           <a:xfrm>
             <a:off x="7051396" y="3519526"/>
-            <a:ext cx="621701" cy="4572"/>
+            <a:ext cx="621701" cy="9144"/>
           </a:xfrm>
           <a:prstGeom prst="line">
             <a:avLst/>
@@ -5518,7 +5518,7 @@
         <p:spPr>
           <a:xfrm>
             <a:off x="7673096" y="3519526"/>
-            <a:ext cx="4572" cy="4572"/>
+            <a:ext cx="9144" cy="9144"/>
           </a:xfrm>
           <a:prstGeom prst="line">
             <a:avLst/>
@@ -5541,7 +5541,7 @@
         <p:spPr>
           <a:xfrm>
             <a:off x="7673096" y="3519526"/>
-            <a:ext cx="4572" cy="112014"/>
+            <a:ext cx="9144" cy="112014"/>
           </a:xfrm>
           <a:prstGeom prst="line">
             <a:avLst/>
@@ -5564,7 +5564,7 @@
         <p:spPr>
           <a:xfrm>
             <a:off x="7673096" y="3631540"/>
-            <a:ext cx="669524" cy="4572"/>
+            <a:ext cx="669524" cy="9144"/>
           </a:xfrm>
           <a:prstGeom prst="line">
             <a:avLst/>
@@ -5587,7 +5587,7 @@
         <p:spPr>
           <a:xfrm>
             <a:off x="8342620" y="3631540"/>
-            <a:ext cx="4572" cy="4572"/>
+            <a:ext cx="9144" cy="9144"/>
           </a:xfrm>
           <a:prstGeom prst="line">
             <a:avLst/>
@@ -5610,7 +5610,7 @@
         <p:spPr>
           <a:xfrm>
             <a:off x="8342620" y="3631540"/>
-            <a:ext cx="4572" cy="112014"/>
+            <a:ext cx="9144" cy="112014"/>
           </a:xfrm>
           <a:prstGeom prst="line">
             <a:avLst/>
@@ -5633,7 +5633,7 @@
         <p:spPr>
           <a:xfrm>
             <a:off x="8342620" y="3743554"/>
-            <a:ext cx="621701" cy="4572"/>
+            <a:ext cx="621701" cy="9144"/>
           </a:xfrm>
           <a:prstGeom prst="line">
             <a:avLst/>
@@ -5656,7 +5656,7 @@
         <p:spPr>
           <a:xfrm>
             <a:off x="8964320" y="3743554"/>
-            <a:ext cx="4572" cy="4572"/>
+            <a:ext cx="9144" cy="9144"/>
           </a:xfrm>
           <a:prstGeom prst="line">
             <a:avLst/>
@@ -5679,7 +5679,7 @@
         <p:spPr>
           <a:xfrm>
             <a:off x="8964320" y="3743554"/>
-            <a:ext cx="4572" cy="67208"/>
+            <a:ext cx="9144" cy="67208"/>
           </a:xfrm>
           <a:prstGeom prst="line">
             <a:avLst/>
@@ -5702,7 +5702,7 @@
         <p:spPr>
           <a:xfrm>
             <a:off x="8964320" y="3810762"/>
-            <a:ext cx="812993" cy="4572"/>
+            <a:ext cx="812993" cy="9144"/>
           </a:xfrm>
           <a:prstGeom prst="line">
             <a:avLst/>
@@ -5725,7 +5725,7 @@
         <p:spPr>
           <a:xfrm>
             <a:off x="9777313" y="3810762"/>
-            <a:ext cx="4572" cy="4572"/>
+            <a:ext cx="9144" cy="9144"/>
           </a:xfrm>
           <a:prstGeom prst="line">
             <a:avLst/>
@@ -5748,7 +5748,7 @@
         <p:spPr>
           <a:xfrm>
             <a:off x="9777313" y="3810762"/>
-            <a:ext cx="4572" cy="112014"/>
+            <a:ext cx="9144" cy="112014"/>
           </a:xfrm>
           <a:prstGeom prst="line">
             <a:avLst/>
@@ -5771,7 +5771,7 @@
         <p:spPr>
           <a:xfrm>
             <a:off x="9777313" y="3922776"/>
-            <a:ext cx="765170" cy="4572"/>
+            <a:ext cx="765170" cy="9144"/>
           </a:xfrm>
           <a:prstGeom prst="line">
             <a:avLst/>
@@ -5794,7 +5794,7 @@
         <p:spPr>
           <a:xfrm>
             <a:off x="10542483" y="3922776"/>
-            <a:ext cx="4572" cy="4572"/>
+            <a:ext cx="9144" cy="9144"/>
           </a:xfrm>
           <a:prstGeom prst="line">
             <a:avLst/>
@@ -5817,7 +5817,7 @@
         <p:spPr>
           <a:xfrm>
             <a:off x="10542483" y="3922776"/>
-            <a:ext cx="4572" cy="89611"/>
+            <a:ext cx="9144" cy="89611"/>
           </a:xfrm>
           <a:prstGeom prst="line">
             <a:avLst/>
@@ -5840,7 +5840,7 @@
         <p:spPr>
           <a:xfrm>
             <a:off x="10542483" y="4012387"/>
-            <a:ext cx="812993" cy="4572"/>
+            <a:ext cx="812993" cy="9144"/>
           </a:xfrm>
           <a:prstGeom prst="line">
             <a:avLst/>
@@ -5902,7 +5902,7 @@
         <p:spPr>
           <a:xfrm>
             <a:off x="6812280" y="3474720"/>
-            <a:ext cx="191292" cy="4572"/>
+            <a:ext cx="191292" cy="9144"/>
           </a:xfrm>
           <a:prstGeom prst="line">
             <a:avLst/>
@@ -5925,7 +5925,7 @@
         <p:spPr>
           <a:xfrm>
             <a:off x="7003572" y="3474720"/>
-            <a:ext cx="4572" cy="4572"/>
+            <a:ext cx="9144" cy="9144"/>
           </a:xfrm>
           <a:prstGeom prst="line">
             <a:avLst/>
@@ -5948,7 +5948,7 @@
         <p:spPr>
           <a:xfrm>
             <a:off x="7003572" y="3474720"/>
-            <a:ext cx="4572" cy="89611"/>
+            <a:ext cx="9144" cy="89611"/>
           </a:xfrm>
           <a:prstGeom prst="line">
             <a:avLst/>
@@ -5971,7 +5971,7 @@
         <p:spPr>
           <a:xfrm>
             <a:off x="7003572" y="3564331"/>
-            <a:ext cx="382585" cy="4572"/>
+            <a:ext cx="382585" cy="9144"/>
           </a:xfrm>
           <a:prstGeom prst="line">
             <a:avLst/>
@@ -5994,7 +5994,7 @@
         <p:spPr>
           <a:xfrm>
             <a:off x="7386157" y="3564331"/>
-            <a:ext cx="4572" cy="4572"/>
+            <a:ext cx="9144" cy="9144"/>
           </a:xfrm>
           <a:prstGeom prst="line">
             <a:avLst/>
@@ -6017,7 +6017,7 @@
         <p:spPr>
           <a:xfrm>
             <a:off x="7386157" y="3564331"/>
-            <a:ext cx="4572" cy="156820"/>
+            <a:ext cx="9144" cy="156820"/>
           </a:xfrm>
           <a:prstGeom prst="line">
             <a:avLst/>
@@ -6040,7 +6040,7 @@
         <p:spPr>
           <a:xfrm>
             <a:off x="7386157" y="3721151"/>
-            <a:ext cx="478231" cy="4572"/>
+            <a:ext cx="478231" cy="9144"/>
           </a:xfrm>
           <a:prstGeom prst="line">
             <a:avLst/>
@@ -6063,7 +6063,7 @@
         <p:spPr>
           <a:xfrm>
             <a:off x="7864389" y="3721151"/>
-            <a:ext cx="4572" cy="4572"/>
+            <a:ext cx="9144" cy="9144"/>
           </a:xfrm>
           <a:prstGeom prst="line">
             <a:avLst/>
@@ -6086,7 +6086,7 @@
         <p:spPr>
           <a:xfrm>
             <a:off x="7864389" y="3721151"/>
-            <a:ext cx="4572" cy="201625"/>
+            <a:ext cx="9144" cy="201625"/>
           </a:xfrm>
           <a:prstGeom prst="line">
             <a:avLst/>
@@ -6109,7 +6109,7 @@
         <p:spPr>
           <a:xfrm>
             <a:off x="7864389" y="3922776"/>
-            <a:ext cx="621701" cy="4572"/>
+            <a:ext cx="621701" cy="9144"/>
           </a:xfrm>
           <a:prstGeom prst="line">
             <a:avLst/>
@@ -6132,7 +6132,7 @@
         <p:spPr>
           <a:xfrm>
             <a:off x="8486089" y="3922776"/>
-            <a:ext cx="4572" cy="4572"/>
+            <a:ext cx="9144" cy="9144"/>
           </a:xfrm>
           <a:prstGeom prst="line">
             <a:avLst/>
@@ -6155,7 +6155,7 @@
         <p:spPr>
           <a:xfrm>
             <a:off x="8486089" y="3922776"/>
-            <a:ext cx="4572" cy="224028"/>
+            <a:ext cx="9144" cy="224028"/>
           </a:xfrm>
           <a:prstGeom prst="line">
             <a:avLst/>
@@ -6178,7 +6178,7 @@
         <p:spPr>
           <a:xfrm>
             <a:off x="8486089" y="4146804"/>
-            <a:ext cx="717347" cy="4572"/>
+            <a:ext cx="717347" cy="9144"/>
           </a:xfrm>
           <a:prstGeom prst="line">
             <a:avLst/>
@@ -6201,7 +6201,7 @@
         <p:spPr>
           <a:xfrm>
             <a:off x="9203436" y="4146804"/>
-            <a:ext cx="4572" cy="4572"/>
+            <a:ext cx="9144" cy="9144"/>
           </a:xfrm>
           <a:prstGeom prst="line">
             <a:avLst/>
@@ -6224,7 +6224,7 @@
         <p:spPr>
           <a:xfrm>
             <a:off x="9203436" y="4146804"/>
-            <a:ext cx="4572" cy="224028"/>
+            <a:ext cx="9144" cy="224028"/>
           </a:xfrm>
           <a:prstGeom prst="line">
             <a:avLst/>
@@ -6247,7 +6247,7 @@
         <p:spPr>
           <a:xfrm>
             <a:off x="9203436" y="4370832"/>
-            <a:ext cx="860816" cy="4572"/>
+            <a:ext cx="860816" cy="9144"/>
           </a:xfrm>
           <a:prstGeom prst="line">
             <a:avLst/>
@@ -6270,7 +6270,7 @@
         <p:spPr>
           <a:xfrm>
             <a:off x="10064252" y="4370832"/>
-            <a:ext cx="4572" cy="4572"/>
+            <a:ext cx="9144" cy="9144"/>
           </a:xfrm>
           <a:prstGeom prst="line">
             <a:avLst/>
@@ -6293,7 +6293,7 @@
         <p:spPr>
           <a:xfrm>
             <a:off x="10064252" y="4370832"/>
-            <a:ext cx="4572" cy="179222"/>
+            <a:ext cx="9144" cy="179222"/>
           </a:xfrm>
           <a:prstGeom prst="line">
             <a:avLst/>
@@ -6316,7 +6316,7 @@
         <p:spPr>
           <a:xfrm>
             <a:off x="10064252" y="4550054"/>
-            <a:ext cx="812993" cy="4572"/>
+            <a:ext cx="812993" cy="9144"/>
           </a:xfrm>
           <a:prstGeom prst="line">
             <a:avLst/>
@@ -6339,7 +6339,7 @@
         <p:spPr>
           <a:xfrm>
             <a:off x="10877245" y="4550054"/>
-            <a:ext cx="4572" cy="4572"/>
+            <a:ext cx="9144" cy="9144"/>
           </a:xfrm>
           <a:prstGeom prst="line">
             <a:avLst/>
@@ -6362,7 +6362,7 @@
         <p:spPr>
           <a:xfrm>
             <a:off x="10877245" y="4550054"/>
-            <a:ext cx="4572" cy="156820"/>
+            <a:ext cx="9144" cy="156820"/>
           </a:xfrm>
           <a:prstGeom prst="line">
             <a:avLst/>
@@ -7038,7 +7038,7 @@
         <p:spPr>
           <a:xfrm>
             <a:off x="8122824" y="3474720"/>
-            <a:ext cx="4572" cy="2240280"/>
+            <a:ext cx="9144" cy="2240280"/>
           </a:xfrm>
           <a:prstGeom prst="line">
             <a:avLst/>
@@ -7100,7 +7100,7 @@
         <p:spPr>
           <a:xfrm>
             <a:off x="7587996" y="3754755"/>
-            <a:ext cx="433395" cy="4572"/>
+            <a:ext cx="433395" cy="9144"/>
           </a:xfrm>
           <a:prstGeom prst="line">
             <a:avLst/>
@@ -7123,7 +7123,7 @@
         <p:spPr>
           <a:xfrm>
             <a:off x="7587996" y="3699891"/>
-            <a:ext cx="4572" cy="109728"/>
+            <a:ext cx="9144" cy="109728"/>
           </a:xfrm>
           <a:prstGeom prst="line">
             <a:avLst/>
@@ -7146,7 +7146,7 @@
         <p:spPr>
           <a:xfrm>
             <a:off x="8021391" y="3699891"/>
-            <a:ext cx="4572" cy="109728"/>
+            <a:ext cx="9144" cy="109728"/>
           </a:xfrm>
           <a:prstGeom prst="line">
             <a:avLst/>
@@ -7228,7 +7228,7 @@
         <p:spPr>
           <a:xfrm>
             <a:off x="8141266" y="4314825"/>
-            <a:ext cx="36885" cy="4572"/>
+            <a:ext cx="36885" cy="9144"/>
           </a:xfrm>
           <a:prstGeom prst="line">
             <a:avLst/>
@@ -7251,7 +7251,7 @@
         <p:spPr>
           <a:xfrm>
             <a:off x="8141266" y="4259961"/>
-            <a:ext cx="4572" cy="109728"/>
+            <a:ext cx="9144" cy="109728"/>
           </a:xfrm>
           <a:prstGeom prst="line">
             <a:avLst/>
@@ -7274,7 +7274,7 @@
         <p:spPr>
           <a:xfrm>
             <a:off x="8178151" y="4259961"/>
-            <a:ext cx="4572" cy="109728"/>
+            <a:ext cx="9144" cy="109728"/>
           </a:xfrm>
           <a:prstGeom prst="line">
             <a:avLst/>
@@ -7356,7 +7356,7 @@
         <p:spPr>
           <a:xfrm>
             <a:off x="7707871" y="4874895"/>
-            <a:ext cx="599376" cy="4572"/>
+            <a:ext cx="599376" cy="9144"/>
           </a:xfrm>
           <a:prstGeom prst="line">
             <a:avLst/>
@@ -7379,7 +7379,7 @@
         <p:spPr>
           <a:xfrm>
             <a:off x="7707871" y="4820031"/>
-            <a:ext cx="4572" cy="109728"/>
+            <a:ext cx="9144" cy="109728"/>
           </a:xfrm>
           <a:prstGeom prst="line">
             <a:avLst/>
@@ -7402,7 +7402,7 @@
         <p:spPr>
           <a:xfrm>
             <a:off x="8307247" y="4820031"/>
-            <a:ext cx="4572" cy="109728"/>
+            <a:ext cx="9144" cy="109728"/>
           </a:xfrm>
           <a:prstGeom prst="line">
             <a:avLst/>
@@ -7484,7 +7484,7 @@
         <p:spPr>
           <a:xfrm>
             <a:off x="8915844" y="5434965"/>
-            <a:ext cx="2314512" cy="4572"/>
+            <a:ext cx="2314512" cy="9144"/>
           </a:xfrm>
           <a:prstGeom prst="line">
             <a:avLst/>
@@ -7507,7 +7507,7 @@
         <p:spPr>
           <a:xfrm>
             <a:off x="8915844" y="5380101"/>
-            <a:ext cx="4572" cy="109728"/>
+            <a:ext cx="9144" cy="109728"/>
           </a:xfrm>
           <a:prstGeom prst="line">
             <a:avLst/>
@@ -7530,7 +7530,7 @@
         <p:spPr>
           <a:xfrm>
             <a:off x="11230356" y="5380101"/>
-            <a:ext cx="4572" cy="109728"/>
+            <a:ext cx="9144" cy="109728"/>
           </a:xfrm>
           <a:prstGeom prst="line">
             <a:avLst/>
@@ -7573,7 +7573,7 @@
         <p:spPr>
           <a:xfrm>
             <a:off x="7223760" y="5760720"/>
-            <a:ext cx="4370832" cy="4572"/>
+            <a:ext cx="4370832" cy="9144"/>
           </a:xfrm>
           <a:prstGeom prst="line">
             <a:avLst/>
@@ -9643,7 +9643,7 @@
         <p:spPr>
           <a:xfrm>
             <a:off x="4200144" y="4366260"/>
-            <a:ext cx="182880" cy="4572"/>
+            <a:ext cx="182880" cy="9144"/>
           </a:xfrm>
           <a:prstGeom prst="line">
             <a:avLst/>
@@ -9843,7 +9843,7 @@
         <p:spPr>
           <a:xfrm>
             <a:off x="7988808" y="4366260"/>
-            <a:ext cx="182880" cy="4572"/>
+            <a:ext cx="182880" cy="9144"/>
           </a:xfrm>
           <a:prstGeom prst="line">
             <a:avLst/>
@@ -28046,7 +28046,7 @@
         <p:spPr>
           <a:xfrm>
             <a:off x="7818120" y="5760720"/>
-            <a:ext cx="3776472" cy="0"/>
+            <a:ext cx="3776472" cy="9144"/>
           </a:xfrm>
           <a:prstGeom prst="line">
             <a:avLst/>
@@ -28069,7 +28069,7 @@
         <p:spPr>
           <a:xfrm>
             <a:off x="7818120" y="3703320"/>
-            <a:ext cx="0" cy="2057400"/>
+            <a:ext cx="9144" cy="2057400"/>
           </a:xfrm>
           <a:prstGeom prst="line">
             <a:avLst/>
